--- a/media/reports/generated/breastscreeningai_ir_presentation_2026.pptx
+++ b/media/reports/generated/breastscreeningai_ir_presentation_2026.pptx
@@ -2015,21 +2015,21 @@
                   <a:srgbClr val="243B53"/>
                 </a:solidFill>
               </a:rPr>
-              <a:t>Complete Hospital da Luz final reporting.</a:t>
-            </a:r>
-          </a:p>
-          <a:p>
-            <a:pPr marL="285750" indent="-142875">
-              <a:buChar char="•"/>
-              <a:defRPr sz="1600"/>
-            </a:pPr>
-            <a:r>
-              <a:rPr lang="en-US" sz="1600">
-                <a:solidFill>
-                  <a:srgbClr val="243B53"/>
-                </a:solidFill>
-              </a:rPr>
-              <a:t>Resolve ULSTMAD infrastructure dependencies.</a:t>
+              <a:t>Complete Clinical Site 18 final reporting.</a:t>
+            </a:r>
+          </a:p>
+          <a:p>
+            <a:pPr marL="285750" indent="-142875">
+              <a:buChar char="•"/>
+              <a:defRPr sz="1600"/>
+            </a:pPr>
+            <a:r>
+              <a:rPr lang="en-US" sz="1600">
+                <a:solidFill>
+                  <a:srgbClr val="243B53"/>
+                </a:solidFill>
+              </a:rPr>
+              <a:t>Resolve Clinical Site 10 infrastructure dependencies.</a:t>
             </a:r>
           </a:p>
           <a:p>
@@ -3240,7 +3240,7 @@
                   <a:srgbClr val="243B53"/>
                 </a:solidFill>
               </a:rPr>
-              <a:t>Earliest documented fieldwork began on 20 November 2015 at Hospital Amadora-Sintra with radiologist Clara Aleluia.</a:t>
+              <a:t>Earliest documented fieldwork began on 20 November 2015 at Clinical Site 1 with Clinician 1.</a:t>
             </a:r>
           </a:p>
           <a:p>
@@ -3933,7 +3933,7 @@
                   <a:srgbClr val="243B53"/>
                 </a:solidFill>
               </a:rPr>
-              <a:t>Hospital da Luz exploratory study involved seven physicians, approximately 11 patients, 23 images, and 110 paired observations.</a:t>
+              <a:t>Clinical Site 18 exploratory study involved seven physicians, approximately 11 patients, 23 images, and 110 paired observations.</a:t>
             </a:r>
           </a:p>
           <a:p>
@@ -4164,7 +4164,7 @@
                   <a:srgbClr val="243B53"/>
                 </a:solidFill>
               </a:rPr>
-              <a:t>CHTMAD/ULSTMAD fieldwork was documented from 17 to 21 November 2025, 5 to 9 January 2026, and 26 to 30 January 2026.</a:t>
+              <a:t>Clinical Site 10 fieldwork was documented from 17 to 21 November 2025, 5 to 9 January 2026, and 26 to 30 January 2026.</a:t>
             </a:r>
           </a:p>
           <a:p>
